--- a/ゲーム科2年/00_前期/ゲーム開発Ⅰ/07_ボックスの当たり判定（AABB）.pptx
+++ b/ゲーム科2年/00_前期/ゲーム開発Ⅰ/07_ボックスの当たり判定（AABB）.pptx
@@ -269,7 +269,7 @@
           <a:p>
             <a:fld id="{E9CC885B-4903-4D54-9A93-00025F12DED9}" type="datetimeFigureOut">
               <a:rPr kumimoji="1" lang="ja-JP" altLang="en-US" smtClean="0"/>
-              <a:t>2024/10/17</a:t>
+              <a:t>2025/1/6</a:t>
             </a:fld>
             <a:endParaRPr kumimoji="1" lang="ja-JP" altLang="en-US"/>
           </a:p>
@@ -499,7 +499,7 @@
           <a:p>
             <a:fld id="{E9CC885B-4903-4D54-9A93-00025F12DED9}" type="datetimeFigureOut">
               <a:rPr kumimoji="1" lang="ja-JP" altLang="en-US" smtClean="0"/>
-              <a:t>2024/10/17</a:t>
+              <a:t>2025/1/6</a:t>
             </a:fld>
             <a:endParaRPr kumimoji="1" lang="ja-JP" altLang="en-US"/>
           </a:p>
@@ -739,7 +739,7 @@
           <a:p>
             <a:fld id="{E9CC885B-4903-4D54-9A93-00025F12DED9}" type="datetimeFigureOut">
               <a:rPr kumimoji="1" lang="ja-JP" altLang="en-US" smtClean="0"/>
-              <a:t>2024/10/17</a:t>
+              <a:t>2025/1/6</a:t>
             </a:fld>
             <a:endParaRPr kumimoji="1" lang="ja-JP" altLang="en-US"/>
           </a:p>
@@ -969,7 +969,7 @@
           <a:p>
             <a:fld id="{E9CC885B-4903-4D54-9A93-00025F12DED9}" type="datetimeFigureOut">
               <a:rPr kumimoji="1" lang="ja-JP" altLang="en-US" smtClean="0"/>
-              <a:t>2024/10/17</a:t>
+              <a:t>2025/1/6</a:t>
             </a:fld>
             <a:endParaRPr kumimoji="1" lang="ja-JP" altLang="en-US"/>
           </a:p>
@@ -1244,7 +1244,7 @@
           <a:p>
             <a:fld id="{E9CC885B-4903-4D54-9A93-00025F12DED9}" type="datetimeFigureOut">
               <a:rPr kumimoji="1" lang="ja-JP" altLang="en-US" smtClean="0"/>
-              <a:t>2024/10/17</a:t>
+              <a:t>2025/1/6</a:t>
             </a:fld>
             <a:endParaRPr kumimoji="1" lang="ja-JP" altLang="en-US"/>
           </a:p>
@@ -1573,7 +1573,7 @@
           <a:p>
             <a:fld id="{E9CC885B-4903-4D54-9A93-00025F12DED9}" type="datetimeFigureOut">
               <a:rPr kumimoji="1" lang="ja-JP" altLang="en-US" smtClean="0"/>
-              <a:t>2024/10/17</a:t>
+              <a:t>2025/1/6</a:t>
             </a:fld>
             <a:endParaRPr kumimoji="1" lang="ja-JP" altLang="en-US"/>
           </a:p>
@@ -2049,7 +2049,7 @@
           <a:p>
             <a:fld id="{E9CC885B-4903-4D54-9A93-00025F12DED9}" type="datetimeFigureOut">
               <a:rPr kumimoji="1" lang="ja-JP" altLang="en-US" smtClean="0"/>
-              <a:t>2024/10/17</a:t>
+              <a:t>2025/1/6</a:t>
             </a:fld>
             <a:endParaRPr kumimoji="1" lang="ja-JP" altLang="en-US"/>
           </a:p>
@@ -2190,7 +2190,7 @@
           <a:p>
             <a:fld id="{E9CC885B-4903-4D54-9A93-00025F12DED9}" type="datetimeFigureOut">
               <a:rPr kumimoji="1" lang="ja-JP" altLang="en-US" smtClean="0"/>
-              <a:t>2024/10/17</a:t>
+              <a:t>2025/1/6</a:t>
             </a:fld>
             <a:endParaRPr kumimoji="1" lang="ja-JP" altLang="en-US"/>
           </a:p>
@@ -2303,7 +2303,7 @@
           <a:p>
             <a:fld id="{E9CC885B-4903-4D54-9A93-00025F12DED9}" type="datetimeFigureOut">
               <a:rPr kumimoji="1" lang="ja-JP" altLang="en-US" smtClean="0"/>
-              <a:t>2024/10/17</a:t>
+              <a:t>2025/1/6</a:t>
             </a:fld>
             <a:endParaRPr kumimoji="1" lang="ja-JP" altLang="en-US"/>
           </a:p>
@@ -2646,7 +2646,7 @@
           <a:p>
             <a:fld id="{E9CC885B-4903-4D54-9A93-00025F12DED9}" type="datetimeFigureOut">
               <a:rPr kumimoji="1" lang="ja-JP" altLang="en-US" smtClean="0"/>
-              <a:t>2024/10/17</a:t>
+              <a:t>2025/1/6</a:t>
             </a:fld>
             <a:endParaRPr kumimoji="1" lang="ja-JP" altLang="en-US"/>
           </a:p>
@@ -2934,7 +2934,7 @@
           <a:p>
             <a:fld id="{E9CC885B-4903-4D54-9A93-00025F12DED9}" type="datetimeFigureOut">
               <a:rPr kumimoji="1" lang="ja-JP" altLang="en-US" smtClean="0"/>
-              <a:t>2024/10/17</a:t>
+              <a:t>2025/1/6</a:t>
             </a:fld>
             <a:endParaRPr kumimoji="1" lang="ja-JP" altLang="en-US"/>
           </a:p>
@@ -3207,7 +3207,7 @@
           <a:p>
             <a:fld id="{E9CC885B-4903-4D54-9A93-00025F12DED9}" type="datetimeFigureOut">
               <a:rPr kumimoji="1" lang="ja-JP" altLang="en-US" smtClean="0"/>
-              <a:t>2024/10/17</a:t>
+              <a:t>2025/1/6</a:t>
             </a:fld>
             <a:endParaRPr kumimoji="1" lang="ja-JP" altLang="en-US"/>
           </a:p>
@@ -3909,10 +3909,18 @@
           <a:lstStyle/>
           <a:p>
             <a:r>
-              <a:rPr kumimoji="1" lang="en-US" altLang="ja-JP" sz="2400" dirty="0" err="1"/>
+              <a:rPr kumimoji="1" lang="en-US" altLang="ja-JP" sz="2400" b="1" dirty="0" err="1">
+                <a:solidFill>
+                  <a:srgbClr val="FF0000"/>
+                </a:solidFill>
+              </a:rPr>
               <a:t>CollisionManager.h</a:t>
             </a:r>
-            <a:endParaRPr kumimoji="1" lang="en-US" altLang="ja-JP" sz="2400" dirty="0"/>
+            <a:endParaRPr kumimoji="1" lang="en-US" altLang="ja-JP" sz="2400" b="1" dirty="0">
+              <a:solidFill>
+                <a:srgbClr val="FF0000"/>
+              </a:solidFill>
+            </a:endParaRPr>
           </a:p>
           <a:p>
             <a:r>
@@ -8400,7 +8408,7 @@
         <p:spPr>
           <a:xfrm>
             <a:off x="567542" y="1216429"/>
-            <a:ext cx="10937610" cy="830997"/>
+            <a:ext cx="10341293" cy="830997"/>
           </a:xfrm>
           <a:prstGeom prst="rect">
             <a:avLst/>
@@ -8423,7 +8431,7 @@
             </a:r>
             <a:r>
               <a:rPr kumimoji="1" lang="ja-JP" altLang="en-US" sz="2400" dirty="0"/>
-              <a:t>の管理や設計には詳しく触れていません。</a:t>
+              <a:t>の管理や設計には詳しく触れません。</a:t>
             </a:r>
             <a:endParaRPr kumimoji="1" lang="en-US" altLang="ja-JP" sz="2400" dirty="0"/>
           </a:p>
@@ -8501,10 +8509,18 @@
           <a:lstStyle/>
           <a:p>
             <a:r>
-              <a:rPr kumimoji="1" lang="en-US" altLang="ja-JP" sz="2400" dirty="0" err="1"/>
+              <a:rPr kumimoji="1" lang="en-US" altLang="ja-JP" sz="2400" b="1" dirty="0" err="1">
+                <a:solidFill>
+                  <a:srgbClr val="FF0000"/>
+                </a:solidFill>
+              </a:rPr>
               <a:t>CollisionAABB.h</a:t>
             </a:r>
-            <a:endParaRPr kumimoji="1" lang="en-US" altLang="ja-JP" sz="2400" dirty="0"/>
+            <a:endParaRPr kumimoji="1" lang="en-US" altLang="ja-JP" sz="2400" b="1" dirty="0">
+              <a:solidFill>
+                <a:srgbClr val="FF0000"/>
+              </a:solidFill>
+            </a:endParaRPr>
           </a:p>
           <a:p>
             <a:r>

--- a/ゲーム科2年/00_前期/ゲーム開発Ⅰ/07_ボックスの当たり判定（AABB）.pptx
+++ b/ゲーム科2年/00_前期/ゲーム開発Ⅰ/07_ボックスの当たり判定（AABB）.pptx
@@ -269,7 +269,7 @@
           <a:p>
             <a:fld id="{E9CC885B-4903-4D54-9A93-00025F12DED9}" type="datetimeFigureOut">
               <a:rPr kumimoji="1" lang="ja-JP" altLang="en-US" smtClean="0"/>
-              <a:t>2025/1/6</a:t>
+              <a:t>2025/2/7</a:t>
             </a:fld>
             <a:endParaRPr kumimoji="1" lang="ja-JP" altLang="en-US"/>
           </a:p>
@@ -499,7 +499,7 @@
           <a:p>
             <a:fld id="{E9CC885B-4903-4D54-9A93-00025F12DED9}" type="datetimeFigureOut">
               <a:rPr kumimoji="1" lang="ja-JP" altLang="en-US" smtClean="0"/>
-              <a:t>2025/1/6</a:t>
+              <a:t>2025/2/7</a:t>
             </a:fld>
             <a:endParaRPr kumimoji="1" lang="ja-JP" altLang="en-US"/>
           </a:p>
@@ -739,7 +739,7 @@
           <a:p>
             <a:fld id="{E9CC885B-4903-4D54-9A93-00025F12DED9}" type="datetimeFigureOut">
               <a:rPr kumimoji="1" lang="ja-JP" altLang="en-US" smtClean="0"/>
-              <a:t>2025/1/6</a:t>
+              <a:t>2025/2/7</a:t>
             </a:fld>
             <a:endParaRPr kumimoji="1" lang="ja-JP" altLang="en-US"/>
           </a:p>
@@ -969,7 +969,7 @@
           <a:p>
             <a:fld id="{E9CC885B-4903-4D54-9A93-00025F12DED9}" type="datetimeFigureOut">
               <a:rPr kumimoji="1" lang="ja-JP" altLang="en-US" smtClean="0"/>
-              <a:t>2025/1/6</a:t>
+              <a:t>2025/2/7</a:t>
             </a:fld>
             <a:endParaRPr kumimoji="1" lang="ja-JP" altLang="en-US"/>
           </a:p>
@@ -1244,7 +1244,7 @@
           <a:p>
             <a:fld id="{E9CC885B-4903-4D54-9A93-00025F12DED9}" type="datetimeFigureOut">
               <a:rPr kumimoji="1" lang="ja-JP" altLang="en-US" smtClean="0"/>
-              <a:t>2025/1/6</a:t>
+              <a:t>2025/2/7</a:t>
             </a:fld>
             <a:endParaRPr kumimoji="1" lang="ja-JP" altLang="en-US"/>
           </a:p>
@@ -1573,7 +1573,7 @@
           <a:p>
             <a:fld id="{E9CC885B-4903-4D54-9A93-00025F12DED9}" type="datetimeFigureOut">
               <a:rPr kumimoji="1" lang="ja-JP" altLang="en-US" smtClean="0"/>
-              <a:t>2025/1/6</a:t>
+              <a:t>2025/2/7</a:t>
             </a:fld>
             <a:endParaRPr kumimoji="1" lang="ja-JP" altLang="en-US"/>
           </a:p>
@@ -2049,7 +2049,7 @@
           <a:p>
             <a:fld id="{E9CC885B-4903-4D54-9A93-00025F12DED9}" type="datetimeFigureOut">
               <a:rPr kumimoji="1" lang="ja-JP" altLang="en-US" smtClean="0"/>
-              <a:t>2025/1/6</a:t>
+              <a:t>2025/2/7</a:t>
             </a:fld>
             <a:endParaRPr kumimoji="1" lang="ja-JP" altLang="en-US"/>
           </a:p>
@@ -2190,7 +2190,7 @@
           <a:p>
             <a:fld id="{E9CC885B-4903-4D54-9A93-00025F12DED9}" type="datetimeFigureOut">
               <a:rPr kumimoji="1" lang="ja-JP" altLang="en-US" smtClean="0"/>
-              <a:t>2025/1/6</a:t>
+              <a:t>2025/2/7</a:t>
             </a:fld>
             <a:endParaRPr kumimoji="1" lang="ja-JP" altLang="en-US"/>
           </a:p>
@@ -2303,7 +2303,7 @@
           <a:p>
             <a:fld id="{E9CC885B-4903-4D54-9A93-00025F12DED9}" type="datetimeFigureOut">
               <a:rPr kumimoji="1" lang="ja-JP" altLang="en-US" smtClean="0"/>
-              <a:t>2025/1/6</a:t>
+              <a:t>2025/2/7</a:t>
             </a:fld>
             <a:endParaRPr kumimoji="1" lang="ja-JP" altLang="en-US"/>
           </a:p>
@@ -2646,7 +2646,7 @@
           <a:p>
             <a:fld id="{E9CC885B-4903-4D54-9A93-00025F12DED9}" type="datetimeFigureOut">
               <a:rPr kumimoji="1" lang="ja-JP" altLang="en-US" smtClean="0"/>
-              <a:t>2025/1/6</a:t>
+              <a:t>2025/2/7</a:t>
             </a:fld>
             <a:endParaRPr kumimoji="1" lang="ja-JP" altLang="en-US"/>
           </a:p>
@@ -2934,7 +2934,7 @@
           <a:p>
             <a:fld id="{E9CC885B-4903-4D54-9A93-00025F12DED9}" type="datetimeFigureOut">
               <a:rPr kumimoji="1" lang="ja-JP" altLang="en-US" smtClean="0"/>
-              <a:t>2025/1/6</a:t>
+              <a:t>2025/2/7</a:t>
             </a:fld>
             <a:endParaRPr kumimoji="1" lang="ja-JP" altLang="en-US"/>
           </a:p>
@@ -3207,7 +3207,7 @@
           <a:p>
             <a:fld id="{E9CC885B-4903-4D54-9A93-00025F12DED9}" type="datetimeFigureOut">
               <a:rPr kumimoji="1" lang="ja-JP" altLang="en-US" smtClean="0"/>
-              <a:t>2025/1/6</a:t>
+              <a:t>2025/2/7</a:t>
             </a:fld>
             <a:endParaRPr kumimoji="1" lang="ja-JP" altLang="en-US"/>
           </a:p>
@@ -4096,7 +4096,7 @@
         <p:spPr>
           <a:xfrm>
             <a:off x="567542" y="4279900"/>
-            <a:ext cx="11556369" cy="2308324"/>
+            <a:ext cx="11761553" cy="2308324"/>
           </a:xfrm>
           <a:prstGeom prst="rect">
             <a:avLst/>
@@ -4114,15 +4114,39 @@
               <a:t>↑</a:t>
             </a:r>
             <a:r>
-              <a:rPr lang="en-US" altLang="ja-JP" sz="2400" dirty="0"/>
-              <a:t>Block.cpp Start</a:t>
+              <a:rPr lang="en-US" altLang="ja-JP" sz="2400" b="1" dirty="0">
+                <a:solidFill>
+                  <a:srgbClr val="FF0000"/>
+                </a:solidFill>
+              </a:rPr>
+              <a:t>Block.cpp </a:t>
+            </a:r>
+            <a:r>
+              <a:rPr lang="en-US" altLang="ja-JP" sz="2400" b="1" dirty="0">
+                <a:solidFill>
+                  <a:srgbClr val="0070C0"/>
+                </a:solidFill>
+              </a:rPr>
+              <a:t>Start</a:t>
+            </a:r>
+            <a:r>
+              <a:rPr lang="ja-JP" altLang="en-US" sz="2400" b="1" dirty="0">
+                <a:solidFill>
+                  <a:srgbClr val="0070C0"/>
+                </a:solidFill>
+              </a:rPr>
+              <a:t>関数</a:t>
             </a:r>
             <a:r>
               <a:rPr lang="ja-JP" altLang="en-US" sz="2400" dirty="0"/>
-              <a:t>関数で</a:t>
-            </a:r>
-            <a:r>
-              <a:rPr lang="en-US" altLang="ja-JP" sz="2400" dirty="0" err="1"/>
+              <a:t>で</a:t>
+            </a:r>
+            <a:r>
+              <a:rPr lang="en-US" altLang="ja-JP" sz="2400" b="1" dirty="0" err="1">
+                <a:solidFill>
+                  <a:srgbClr val="00B050"/>
+                </a:solidFill>
+              </a:rPr>
               <a:t>CollisionManager</a:t>
             </a:r>
             <a:r>
@@ -4130,7 +4154,11 @@
               <a:t>に</a:t>
             </a:r>
             <a:r>
-              <a:rPr lang="en-US" altLang="ja-JP" sz="2400" dirty="0"/>
+              <a:rPr lang="en-US" altLang="ja-JP" sz="2400" b="1" dirty="0">
+                <a:solidFill>
+                  <a:srgbClr val="00B050"/>
+                </a:solidFill>
+              </a:rPr>
               <a:t>AABB</a:t>
             </a:r>
             <a:r>

--- a/ゲーム科2年/00_前期/ゲーム開発Ⅰ/07_ボックスの当たり判定（AABB）.pptx
+++ b/ゲーム科2年/00_前期/ゲーム開発Ⅰ/07_ボックスの当たり判定（AABB）.pptx
@@ -16,6 +16,8 @@
     <p:sldId id="265" r:id="rId10"/>
     <p:sldId id="266" r:id="rId11"/>
     <p:sldId id="267" r:id="rId12"/>
+    <p:sldId id="268" r:id="rId13"/>
+    <p:sldId id="269" r:id="rId14"/>
   </p:sldIdLst>
   <p:sldSz cx="12192000" cy="6858000"/>
   <p:notesSz cx="6858000" cy="9144000"/>
@@ -269,7 +271,7 @@
           <a:p>
             <a:fld id="{E9CC885B-4903-4D54-9A93-00025F12DED9}" type="datetimeFigureOut">
               <a:rPr kumimoji="1" lang="ja-JP" altLang="en-US" smtClean="0"/>
-              <a:t>2025/2/7</a:t>
+              <a:t>2026/2/5</a:t>
             </a:fld>
             <a:endParaRPr kumimoji="1" lang="ja-JP" altLang="en-US"/>
           </a:p>
@@ -499,7 +501,7 @@
           <a:p>
             <a:fld id="{E9CC885B-4903-4D54-9A93-00025F12DED9}" type="datetimeFigureOut">
               <a:rPr kumimoji="1" lang="ja-JP" altLang="en-US" smtClean="0"/>
-              <a:t>2025/2/7</a:t>
+              <a:t>2026/2/5</a:t>
             </a:fld>
             <a:endParaRPr kumimoji="1" lang="ja-JP" altLang="en-US"/>
           </a:p>
@@ -739,7 +741,7 @@
           <a:p>
             <a:fld id="{E9CC885B-4903-4D54-9A93-00025F12DED9}" type="datetimeFigureOut">
               <a:rPr kumimoji="1" lang="ja-JP" altLang="en-US" smtClean="0"/>
-              <a:t>2025/2/7</a:t>
+              <a:t>2026/2/5</a:t>
             </a:fld>
             <a:endParaRPr kumimoji="1" lang="ja-JP" altLang="en-US"/>
           </a:p>
@@ -969,7 +971,7 @@
           <a:p>
             <a:fld id="{E9CC885B-4903-4D54-9A93-00025F12DED9}" type="datetimeFigureOut">
               <a:rPr kumimoji="1" lang="ja-JP" altLang="en-US" smtClean="0"/>
-              <a:t>2025/2/7</a:t>
+              <a:t>2026/2/5</a:t>
             </a:fld>
             <a:endParaRPr kumimoji="1" lang="ja-JP" altLang="en-US"/>
           </a:p>
@@ -1244,7 +1246,7 @@
           <a:p>
             <a:fld id="{E9CC885B-4903-4D54-9A93-00025F12DED9}" type="datetimeFigureOut">
               <a:rPr kumimoji="1" lang="ja-JP" altLang="en-US" smtClean="0"/>
-              <a:t>2025/2/7</a:t>
+              <a:t>2026/2/5</a:t>
             </a:fld>
             <a:endParaRPr kumimoji="1" lang="ja-JP" altLang="en-US"/>
           </a:p>
@@ -1573,7 +1575,7 @@
           <a:p>
             <a:fld id="{E9CC885B-4903-4D54-9A93-00025F12DED9}" type="datetimeFigureOut">
               <a:rPr kumimoji="1" lang="ja-JP" altLang="en-US" smtClean="0"/>
-              <a:t>2025/2/7</a:t>
+              <a:t>2026/2/5</a:t>
             </a:fld>
             <a:endParaRPr kumimoji="1" lang="ja-JP" altLang="en-US"/>
           </a:p>
@@ -2049,7 +2051,7 @@
           <a:p>
             <a:fld id="{E9CC885B-4903-4D54-9A93-00025F12DED9}" type="datetimeFigureOut">
               <a:rPr kumimoji="1" lang="ja-JP" altLang="en-US" smtClean="0"/>
-              <a:t>2025/2/7</a:t>
+              <a:t>2026/2/5</a:t>
             </a:fld>
             <a:endParaRPr kumimoji="1" lang="ja-JP" altLang="en-US"/>
           </a:p>
@@ -2190,7 +2192,7 @@
           <a:p>
             <a:fld id="{E9CC885B-4903-4D54-9A93-00025F12DED9}" type="datetimeFigureOut">
               <a:rPr kumimoji="1" lang="ja-JP" altLang="en-US" smtClean="0"/>
-              <a:t>2025/2/7</a:t>
+              <a:t>2026/2/5</a:t>
             </a:fld>
             <a:endParaRPr kumimoji="1" lang="ja-JP" altLang="en-US"/>
           </a:p>
@@ -2303,7 +2305,7 @@
           <a:p>
             <a:fld id="{E9CC885B-4903-4D54-9A93-00025F12DED9}" type="datetimeFigureOut">
               <a:rPr kumimoji="1" lang="ja-JP" altLang="en-US" smtClean="0"/>
-              <a:t>2025/2/7</a:t>
+              <a:t>2026/2/5</a:t>
             </a:fld>
             <a:endParaRPr kumimoji="1" lang="ja-JP" altLang="en-US"/>
           </a:p>
@@ -2646,7 +2648,7 @@
           <a:p>
             <a:fld id="{E9CC885B-4903-4D54-9A93-00025F12DED9}" type="datetimeFigureOut">
               <a:rPr kumimoji="1" lang="ja-JP" altLang="en-US" smtClean="0"/>
-              <a:t>2025/2/7</a:t>
+              <a:t>2026/2/5</a:t>
             </a:fld>
             <a:endParaRPr kumimoji="1" lang="ja-JP" altLang="en-US"/>
           </a:p>
@@ -2934,7 +2936,7 @@
           <a:p>
             <a:fld id="{E9CC885B-4903-4D54-9A93-00025F12DED9}" type="datetimeFigureOut">
               <a:rPr kumimoji="1" lang="ja-JP" altLang="en-US" smtClean="0"/>
-              <a:t>2025/2/7</a:t>
+              <a:t>2026/2/5</a:t>
             </a:fld>
             <a:endParaRPr kumimoji="1" lang="ja-JP" altLang="en-US"/>
           </a:p>
@@ -3207,7 +3209,7 @@
           <a:p>
             <a:fld id="{E9CC885B-4903-4D54-9A93-00025F12DED9}" type="datetimeFigureOut">
               <a:rPr kumimoji="1" lang="ja-JP" altLang="en-US" smtClean="0"/>
-              <a:t>2025/2/7</a:t>
+              <a:t>2026/2/5</a:t>
             </a:fld>
             <a:endParaRPr kumimoji="1" lang="ja-JP" altLang="en-US"/>
           </a:p>
@@ -3708,7 +3710,7 @@
                   <a:srgbClr val="FF0000"/>
                 </a:solidFill>
               </a:rPr>
-              <a:t>■２種類のボックス判定</a:t>
+              <a:t>■２種類のボックス当たり判定</a:t>
             </a:r>
             <a:endParaRPr lang="en-US" altLang="ja-JP" sz="2400" b="1" dirty="0">
               <a:solidFill>
@@ -3819,7 +3821,7 @@
         <p:spPr>
           <a:xfrm>
             <a:off x="567542" y="1216429"/>
-            <a:ext cx="2935419" cy="461665"/>
+            <a:ext cx="3079689" cy="461665"/>
           </a:xfrm>
           <a:prstGeom prst="rect">
             <a:avLst/>
@@ -3833,23 +3835,27 @@
           <a:lstStyle/>
           <a:p>
             <a:r>
-              <a:rPr kumimoji="1" lang="en-US" altLang="ja-JP" sz="2400" dirty="0"/>
-              <a:t>Collision</a:t>
-            </a:r>
-            <a:r>
-              <a:rPr kumimoji="1" lang="ja-JP" altLang="en-US" sz="2400" dirty="0"/>
-              <a:t>管理つづき</a:t>
-            </a:r>
-            <a:endParaRPr lang="en-US" altLang="ja-JP" sz="2400" dirty="0"/>
+              <a:rPr kumimoji="1" lang="en-US" altLang="ja-JP" sz="2400" b="1" dirty="0" err="1">
+                <a:solidFill>
+                  <a:srgbClr val="FF0000"/>
+                </a:solidFill>
+              </a:rPr>
+              <a:t>CollisionManager.h</a:t>
+            </a:r>
+            <a:endParaRPr lang="en-US" altLang="ja-JP" sz="2400" b="1" dirty="0">
+              <a:solidFill>
+                <a:srgbClr val="FF0000"/>
+              </a:solidFill>
+            </a:endParaRPr>
           </a:p>
         </p:txBody>
       </p:sp>
       <p:pic>
         <p:nvPicPr>
-          <p:cNvPr id="6" name="図 5">
-            <a:extLst>
-              <a:ext uri="{FF2B5EF4-FFF2-40B4-BE49-F238E27FC236}">
-                <a16:creationId xmlns:a16="http://schemas.microsoft.com/office/drawing/2014/main" id="{C5AC84CA-C9C3-4F3D-9BAF-BF7153FAFE80}"/>
+          <p:cNvPr id="3" name="図 2">
+            <a:extLst>
+              <a:ext uri="{FF2B5EF4-FFF2-40B4-BE49-F238E27FC236}">
+                <a16:creationId xmlns:a16="http://schemas.microsoft.com/office/drawing/2014/main" id="{80BF62C9-2E2F-4D12-99FA-951671695E54}"/>
               </a:ext>
             </a:extLst>
           </p:cNvPr>
@@ -3859,13 +3865,7 @@
           <p:nvPr/>
         </p:nvPicPr>
         <p:blipFill>
-          <a:blip r:embed="rId2">
-            <a:extLst>
-              <a:ext uri="{28A0092B-C50C-407E-A947-70E740481C1C}">
-                <a14:useLocalDpi xmlns:a14="http://schemas.microsoft.com/office/drawing/2010/main" val="0"/>
-              </a:ext>
-            </a:extLst>
-          </a:blip>
+          <a:blip r:embed="rId2"/>
           <a:stretch>
             <a:fillRect/>
           </a:stretch>
@@ -3873,7 +3873,7 @@
         <p:spPr>
           <a:xfrm>
             <a:off x="567542" y="1817794"/>
-            <a:ext cx="7068546" cy="4548252"/>
+            <a:ext cx="6478717" cy="3482310"/>
           </a:xfrm>
           <a:prstGeom prst="rect">
             <a:avLst/>
@@ -3882,10 +3882,10 @@
       </p:pic>
       <p:sp>
         <p:nvSpPr>
-          <p:cNvPr id="9" name="テキスト ボックス 8">
-            <a:extLst>
-              <a:ext uri="{FF2B5EF4-FFF2-40B4-BE49-F238E27FC236}">
-                <a16:creationId xmlns:a16="http://schemas.microsoft.com/office/drawing/2014/main" id="{849D45E5-A75B-4623-9F89-58370ADA12E7}"/>
+          <p:cNvPr id="8" name="テキスト ボックス 7">
+            <a:extLst>
+              <a:ext uri="{FF2B5EF4-FFF2-40B4-BE49-F238E27FC236}">
+                <a16:creationId xmlns:a16="http://schemas.microsoft.com/office/drawing/2014/main" id="{D65530EF-BADE-4F37-8FD4-09D21C7C8495}"/>
               </a:ext>
             </a:extLst>
           </p:cNvPr>
@@ -3894,8 +3894,8 @@
         </p:nvSpPr>
         <p:spPr>
           <a:xfrm>
-            <a:off x="6828642" y="5347275"/>
-            <a:ext cx="4387740" cy="830997"/>
+            <a:off x="567542" y="5568210"/>
+            <a:ext cx="7582525" cy="830997"/>
           </a:xfrm>
           <a:prstGeom prst="rect">
             <a:avLst/>
@@ -3909,31 +3909,31 @@
           <a:lstStyle/>
           <a:p>
             <a:r>
-              <a:rPr kumimoji="1" lang="en-US" altLang="ja-JP" sz="2400" b="1" dirty="0" err="1">
+              <a:rPr lang="en-US" altLang="ja-JP" sz="2400" b="1" dirty="0">
                 <a:solidFill>
-                  <a:srgbClr val="FF0000"/>
+                  <a:srgbClr val="0070C0"/>
                 </a:solidFill>
               </a:rPr>
-              <a:t>CollisionManager.h</a:t>
-            </a:r>
-            <a:endParaRPr kumimoji="1" lang="en-US" altLang="ja-JP" sz="2400" b="1" dirty="0">
-              <a:solidFill>
-                <a:srgbClr val="FF0000"/>
-              </a:solidFill>
-            </a:endParaRPr>
-          </a:p>
-          <a:p>
+              <a:t>vector</a:t>
+            </a:r>
+            <a:r>
+              <a:rPr lang="ja-JP" altLang="en-US" sz="2400" b="1" dirty="0">
+                <a:solidFill>
+                  <a:srgbClr val="0070C0"/>
+                </a:solidFill>
+              </a:rPr>
+              <a:t>配列</a:t>
+            </a:r>
             <a:r>
               <a:rPr lang="ja-JP" altLang="en-US" sz="2400" dirty="0"/>
-              <a:t>この配列で</a:t>
-            </a:r>
-            <a:r>
-              <a:rPr lang="en-US" altLang="ja-JP" sz="2400" dirty="0"/>
-              <a:t>AABB</a:t>
-            </a:r>
+              <a:t>で管理すると、必要な数だけ管理できる。</a:t>
+            </a:r>
+            <a:endParaRPr lang="en-US" altLang="ja-JP" sz="2400" dirty="0"/>
+          </a:p>
+          <a:p>
             <a:r>
               <a:rPr lang="ja-JP" altLang="en-US" sz="2400" dirty="0"/>
-              <a:t>を管理する。</a:t>
+              <a:t>キャラクターの数だけ必要な当たり判定には最適。</a:t>
             </a:r>
             <a:endParaRPr lang="en-US" altLang="ja-JP" sz="2400" dirty="0"/>
           </a:p>
@@ -4020,7 +4020,7 @@
         <p:spPr>
           <a:xfrm>
             <a:off x="567542" y="1216429"/>
-            <a:ext cx="2935419" cy="461665"/>
+            <a:ext cx="4737194" cy="461665"/>
           </a:xfrm>
           <a:prstGeom prst="rect">
             <a:avLst/>
@@ -4034,14 +4034,26 @@
           <a:lstStyle/>
           <a:p>
             <a:r>
-              <a:rPr kumimoji="1" lang="en-US" altLang="ja-JP" sz="2400" dirty="0"/>
-              <a:t>Collision</a:t>
-            </a:r>
-            <a:r>
-              <a:rPr kumimoji="1" lang="ja-JP" altLang="en-US" sz="2400" dirty="0"/>
-              <a:t>管理つづき</a:t>
-            </a:r>
-            <a:endParaRPr lang="en-US" altLang="ja-JP" sz="2400" dirty="0"/>
+              <a:rPr kumimoji="1" lang="en-US" altLang="ja-JP" sz="2400" b="1" dirty="0">
+                <a:solidFill>
+                  <a:srgbClr val="FF0000"/>
+                </a:solidFill>
+              </a:rPr>
+              <a:t>AABB</a:t>
+            </a:r>
+            <a:r>
+              <a:rPr kumimoji="1" lang="ja-JP" altLang="en-US" sz="2400" b="1" dirty="0">
+                <a:solidFill>
+                  <a:srgbClr val="FF0000"/>
+                </a:solidFill>
+              </a:rPr>
+              <a:t>をブロックに設定する処理</a:t>
+            </a:r>
+            <a:endParaRPr lang="en-US" altLang="ja-JP" sz="2400" b="1" dirty="0">
+              <a:solidFill>
+                <a:srgbClr val="FF0000"/>
+              </a:solidFill>
+            </a:endParaRPr>
           </a:p>
         </p:txBody>
       </p:sp>
@@ -4264,6 +4276,424 @@
     <p:extLst>
       <p:ext uri="{BB962C8B-B14F-4D97-AF65-F5344CB8AC3E}">
         <p14:creationId xmlns:p14="http://schemas.microsoft.com/office/powerpoint/2010/main" val="310398824"/>
+      </p:ext>
+    </p:extLst>
+  </p:cSld>
+  <p:clrMapOvr>
+    <a:masterClrMapping/>
+  </p:clrMapOvr>
+</p:sld>
+</file>
+
+<file path=ppt/slides/slide12.xml><?xml version="1.0" encoding="utf-8"?>
+<p:sld xmlns:a="http://schemas.openxmlformats.org/drawingml/2006/main" xmlns:r="http://schemas.openxmlformats.org/officeDocument/2006/relationships" xmlns:p="http://schemas.openxmlformats.org/presentationml/2006/main">
+  <p:cSld>
+    <p:spTree>
+      <p:nvGrpSpPr>
+        <p:cNvPr id="1" name=""/>
+        <p:cNvGrpSpPr/>
+        <p:nvPr/>
+      </p:nvGrpSpPr>
+      <p:grpSpPr>
+        <a:xfrm>
+          <a:off x="0" y="0"/>
+          <a:ext cx="0" cy="0"/>
+          <a:chOff x="0" y="0"/>
+          <a:chExt cx="0" cy="0"/>
+        </a:xfrm>
+      </p:grpSpPr>
+      <p:sp>
+        <p:nvSpPr>
+          <p:cNvPr id="4" name="テキスト ボックス 3">
+            <a:extLst>
+              <a:ext uri="{FF2B5EF4-FFF2-40B4-BE49-F238E27FC236}">
+                <a16:creationId xmlns:a16="http://schemas.microsoft.com/office/drawing/2014/main" id="{5A13BF46-B8C5-48AA-8308-C9ECFF431A18}"/>
+              </a:ext>
+            </a:extLst>
+          </p:cNvPr>
+          <p:cNvSpPr txBox="1"/>
+          <p:nvPr/>
+        </p:nvSpPr>
+        <p:spPr>
+          <a:xfrm>
+            <a:off x="567542" y="491954"/>
+            <a:ext cx="4288353" cy="584775"/>
+          </a:xfrm>
+          <a:prstGeom prst="rect">
+            <a:avLst/>
+          </a:prstGeom>
+          <a:noFill/>
+        </p:spPr>
+        <p:txBody>
+          <a:bodyPr wrap="none" rtlCol="0">
+            <a:spAutoFit/>
+          </a:bodyPr>
+          <a:lstStyle/>
+          <a:p>
+            <a:r>
+              <a:rPr kumimoji="1" lang="ja-JP" altLang="en-US" sz="3200" b="1" u="sng" dirty="0"/>
+              <a:t>ボックスの当たり判定</a:t>
+            </a:r>
+            <a:endParaRPr kumimoji="1" lang="en-US" altLang="ja-JP" sz="3200" b="1" u="sng" dirty="0"/>
+          </a:p>
+        </p:txBody>
+      </p:sp>
+      <p:sp>
+        <p:nvSpPr>
+          <p:cNvPr id="5" name="テキスト ボックス 4">
+            <a:extLst>
+              <a:ext uri="{FF2B5EF4-FFF2-40B4-BE49-F238E27FC236}">
+                <a16:creationId xmlns:a16="http://schemas.microsoft.com/office/drawing/2014/main" id="{D67A2B47-3098-4F1C-837F-51650A635690}"/>
+              </a:ext>
+            </a:extLst>
+          </p:cNvPr>
+          <p:cNvSpPr txBox="1"/>
+          <p:nvPr/>
+        </p:nvSpPr>
+        <p:spPr>
+          <a:xfrm>
+            <a:off x="567542" y="1216429"/>
+            <a:ext cx="6074099" cy="461665"/>
+          </a:xfrm>
+          <a:prstGeom prst="rect">
+            <a:avLst/>
+          </a:prstGeom>
+          <a:noFill/>
+        </p:spPr>
+        <p:txBody>
+          <a:bodyPr wrap="none" rtlCol="0">
+            <a:spAutoFit/>
+          </a:bodyPr>
+          <a:lstStyle/>
+          <a:p>
+            <a:r>
+              <a:rPr kumimoji="1" lang="ja-JP" altLang="en-US" sz="2400" b="1" dirty="0">
+                <a:solidFill>
+                  <a:srgbClr val="FF0000"/>
+                </a:solidFill>
+              </a:rPr>
+              <a:t>当たった後の押し出し処理（</a:t>
+            </a:r>
+            <a:r>
+              <a:rPr kumimoji="1" lang="en-US" altLang="ja-JP" sz="2400" b="1" dirty="0">
+                <a:solidFill>
+                  <a:srgbClr val="FF0000"/>
+                </a:solidFill>
+              </a:rPr>
+              <a:t>Player.cpp</a:t>
+            </a:r>
+            <a:r>
+              <a:rPr kumimoji="1" lang="ja-JP" altLang="en-US" sz="2400" b="1" dirty="0">
+                <a:solidFill>
+                  <a:srgbClr val="FF0000"/>
+                </a:solidFill>
+              </a:rPr>
+              <a:t>）</a:t>
+            </a:r>
+            <a:endParaRPr lang="en-US" altLang="ja-JP" sz="2400" b="1" dirty="0">
+              <a:solidFill>
+                <a:srgbClr val="FF0000"/>
+              </a:solidFill>
+            </a:endParaRPr>
+          </a:p>
+        </p:txBody>
+      </p:sp>
+      <p:pic>
+        <p:nvPicPr>
+          <p:cNvPr id="9" name="図 8">
+            <a:extLst>
+              <a:ext uri="{FF2B5EF4-FFF2-40B4-BE49-F238E27FC236}">
+                <a16:creationId xmlns:a16="http://schemas.microsoft.com/office/drawing/2014/main" id="{F42E6CF9-B37F-4455-9B32-A58278568C8F}"/>
+              </a:ext>
+            </a:extLst>
+          </p:cNvPr>
+          <p:cNvPicPr>
+            <a:picLocks noChangeAspect="1"/>
+          </p:cNvPicPr>
+          <p:nvPr/>
+        </p:nvPicPr>
+        <p:blipFill>
+          <a:blip r:embed="rId2"/>
+          <a:stretch>
+            <a:fillRect/>
+          </a:stretch>
+        </p:blipFill>
+        <p:spPr>
+          <a:xfrm>
+            <a:off x="567543" y="1817794"/>
+            <a:ext cx="4712670" cy="3541893"/>
+          </a:xfrm>
+          <a:prstGeom prst="rect">
+            <a:avLst/>
+          </a:prstGeom>
+        </p:spPr>
+      </p:pic>
+      <p:sp>
+        <p:nvSpPr>
+          <p:cNvPr id="10" name="テキスト ボックス 9">
+            <a:extLst>
+              <a:ext uri="{FF2B5EF4-FFF2-40B4-BE49-F238E27FC236}">
+                <a16:creationId xmlns:a16="http://schemas.microsoft.com/office/drawing/2014/main" id="{9886802F-7535-4725-A776-D4FBFA7B5631}"/>
+              </a:ext>
+            </a:extLst>
+          </p:cNvPr>
+          <p:cNvSpPr txBox="1"/>
+          <p:nvPr/>
+        </p:nvSpPr>
+        <p:spPr>
+          <a:xfrm>
+            <a:off x="567543" y="5423646"/>
+            <a:ext cx="10405258" cy="830997"/>
+          </a:xfrm>
+          <a:prstGeom prst="rect">
+            <a:avLst/>
+          </a:prstGeom>
+          <a:noFill/>
+        </p:spPr>
+        <p:txBody>
+          <a:bodyPr wrap="square" rtlCol="0">
+            <a:spAutoFit/>
+          </a:bodyPr>
+          <a:lstStyle/>
+          <a:p>
+            <a:r>
+              <a:rPr lang="ja-JP" altLang="en-US" sz="2400" b="1" dirty="0">
+                <a:solidFill>
+                  <a:srgbClr val="FF0000"/>
+                </a:solidFill>
+              </a:rPr>
+              <a:t>軸別</a:t>
+            </a:r>
+            <a:r>
+              <a:rPr lang="ja-JP" altLang="en-US" sz="2400" dirty="0"/>
+              <a:t>に「</a:t>
+            </a:r>
+            <a:r>
+              <a:rPr lang="ja-JP" altLang="en-US" sz="2400" b="1" dirty="0">
+                <a:solidFill>
+                  <a:srgbClr val="FF0000"/>
+                </a:solidFill>
+              </a:rPr>
+              <a:t>移動→当たり判定→押し出し</a:t>
+            </a:r>
+            <a:r>
+              <a:rPr lang="ja-JP" altLang="en-US" sz="2400" dirty="0"/>
+              <a:t>」とすれば、</a:t>
+            </a:r>
+            <a:endParaRPr lang="en-US" altLang="ja-JP" sz="2400" dirty="0"/>
+          </a:p>
+          <a:p>
+            <a:r>
+              <a:rPr lang="ja-JP" altLang="en-US" sz="2400" dirty="0"/>
+              <a:t>違和感なく押し出し処理を実装できます。</a:t>
+            </a:r>
+            <a:endParaRPr lang="en-US" altLang="ja-JP" sz="2400" dirty="0"/>
+          </a:p>
+        </p:txBody>
+      </p:sp>
+    </p:spTree>
+    <p:extLst>
+      <p:ext uri="{BB962C8B-B14F-4D97-AF65-F5344CB8AC3E}">
+        <p14:creationId xmlns:p14="http://schemas.microsoft.com/office/powerpoint/2010/main" val="143613743"/>
+      </p:ext>
+    </p:extLst>
+  </p:cSld>
+  <p:clrMapOvr>
+    <a:masterClrMapping/>
+  </p:clrMapOvr>
+</p:sld>
+</file>
+
+<file path=ppt/slides/slide13.xml><?xml version="1.0" encoding="utf-8"?>
+<p:sld xmlns:a="http://schemas.openxmlformats.org/drawingml/2006/main" xmlns:r="http://schemas.openxmlformats.org/officeDocument/2006/relationships" xmlns:p="http://schemas.openxmlformats.org/presentationml/2006/main">
+  <p:cSld>
+    <p:spTree>
+      <p:nvGrpSpPr>
+        <p:cNvPr id="1" name=""/>
+        <p:cNvGrpSpPr/>
+        <p:nvPr/>
+      </p:nvGrpSpPr>
+      <p:grpSpPr>
+        <a:xfrm>
+          <a:off x="0" y="0"/>
+          <a:ext cx="0" cy="0"/>
+          <a:chOff x="0" y="0"/>
+          <a:chExt cx="0" cy="0"/>
+        </a:xfrm>
+      </p:grpSpPr>
+      <p:sp>
+        <p:nvSpPr>
+          <p:cNvPr id="4" name="テキスト ボックス 3">
+            <a:extLst>
+              <a:ext uri="{FF2B5EF4-FFF2-40B4-BE49-F238E27FC236}">
+                <a16:creationId xmlns:a16="http://schemas.microsoft.com/office/drawing/2014/main" id="{5A13BF46-B8C5-48AA-8308-C9ECFF431A18}"/>
+              </a:ext>
+            </a:extLst>
+          </p:cNvPr>
+          <p:cNvSpPr txBox="1"/>
+          <p:nvPr/>
+        </p:nvSpPr>
+        <p:spPr>
+          <a:xfrm>
+            <a:off x="567542" y="491954"/>
+            <a:ext cx="4288353" cy="584775"/>
+          </a:xfrm>
+          <a:prstGeom prst="rect">
+            <a:avLst/>
+          </a:prstGeom>
+          <a:noFill/>
+        </p:spPr>
+        <p:txBody>
+          <a:bodyPr wrap="none" rtlCol="0">
+            <a:spAutoFit/>
+          </a:bodyPr>
+          <a:lstStyle/>
+          <a:p>
+            <a:r>
+              <a:rPr kumimoji="1" lang="ja-JP" altLang="en-US" sz="3200" b="1" u="sng" dirty="0"/>
+              <a:t>ボックスの当たり判定</a:t>
+            </a:r>
+            <a:endParaRPr kumimoji="1" lang="en-US" altLang="ja-JP" sz="3200" b="1" u="sng" dirty="0"/>
+          </a:p>
+        </p:txBody>
+      </p:sp>
+      <p:sp>
+        <p:nvSpPr>
+          <p:cNvPr id="5" name="テキスト ボックス 4">
+            <a:extLst>
+              <a:ext uri="{FF2B5EF4-FFF2-40B4-BE49-F238E27FC236}">
+                <a16:creationId xmlns:a16="http://schemas.microsoft.com/office/drawing/2014/main" id="{D67A2B47-3098-4F1C-837F-51650A635690}"/>
+              </a:ext>
+            </a:extLst>
+          </p:cNvPr>
+          <p:cNvSpPr txBox="1"/>
+          <p:nvPr/>
+        </p:nvSpPr>
+        <p:spPr>
+          <a:xfrm>
+            <a:off x="567542" y="1216429"/>
+            <a:ext cx="7329251" cy="461665"/>
+          </a:xfrm>
+          <a:prstGeom prst="rect">
+            <a:avLst/>
+          </a:prstGeom>
+          <a:noFill/>
+        </p:spPr>
+        <p:txBody>
+          <a:bodyPr wrap="none" rtlCol="0">
+            <a:spAutoFit/>
+          </a:bodyPr>
+          <a:lstStyle/>
+          <a:p>
+            <a:r>
+              <a:rPr kumimoji="1" lang="ja-JP" altLang="en-US" sz="2400" b="1" dirty="0">
+                <a:solidFill>
+                  <a:srgbClr val="FF0000"/>
+                </a:solidFill>
+              </a:rPr>
+              <a:t>当たり判定結果の構造体（</a:t>
+            </a:r>
+            <a:r>
+              <a:rPr kumimoji="1" lang="en-US" altLang="ja-JP" sz="2400" b="1" dirty="0" err="1">
+                <a:solidFill>
+                  <a:srgbClr val="FF0000"/>
+                </a:solidFill>
+              </a:rPr>
+              <a:t>CollisionParameter.h</a:t>
+            </a:r>
+            <a:r>
+              <a:rPr kumimoji="1" lang="ja-JP" altLang="en-US" sz="2400" b="1" dirty="0">
+                <a:solidFill>
+                  <a:srgbClr val="FF0000"/>
+                </a:solidFill>
+              </a:rPr>
+              <a:t>）</a:t>
+            </a:r>
+            <a:endParaRPr lang="en-US" altLang="ja-JP" sz="2400" b="1" dirty="0">
+              <a:solidFill>
+                <a:srgbClr val="FF0000"/>
+              </a:solidFill>
+            </a:endParaRPr>
+          </a:p>
+        </p:txBody>
+      </p:sp>
+      <p:sp>
+        <p:nvSpPr>
+          <p:cNvPr id="10" name="テキスト ボックス 9">
+            <a:extLst>
+              <a:ext uri="{FF2B5EF4-FFF2-40B4-BE49-F238E27FC236}">
+                <a16:creationId xmlns:a16="http://schemas.microsoft.com/office/drawing/2014/main" id="{9886802F-7535-4725-A776-D4FBFA7B5631}"/>
+              </a:ext>
+            </a:extLst>
+          </p:cNvPr>
+          <p:cNvSpPr txBox="1"/>
+          <p:nvPr/>
+        </p:nvSpPr>
+        <p:spPr>
+          <a:xfrm>
+            <a:off x="567543" y="5423646"/>
+            <a:ext cx="10405258" cy="830997"/>
+          </a:xfrm>
+          <a:prstGeom prst="rect">
+            <a:avLst/>
+          </a:prstGeom>
+          <a:noFill/>
+        </p:spPr>
+        <p:txBody>
+          <a:bodyPr wrap="square" rtlCol="0">
+            <a:spAutoFit/>
+          </a:bodyPr>
+          <a:lstStyle/>
+          <a:p>
+            <a:r>
+              <a:rPr lang="ja-JP" altLang="en-US" sz="2400" dirty="0"/>
+              <a:t>当たったかどうかだけでなく、</a:t>
+            </a:r>
+            <a:endParaRPr lang="en-US" altLang="ja-JP" sz="2400" dirty="0"/>
+          </a:p>
+          <a:p>
+            <a:r>
+              <a:rPr lang="ja-JP" altLang="en-US" sz="2400" dirty="0"/>
+              <a:t>当たったものの位置や大きさもあると、後の処理がしやすいです。</a:t>
+            </a:r>
+            <a:endParaRPr lang="en-US" altLang="ja-JP" sz="2400" dirty="0"/>
+          </a:p>
+        </p:txBody>
+      </p:sp>
+      <p:pic>
+        <p:nvPicPr>
+          <p:cNvPr id="3" name="図 2">
+            <a:extLst>
+              <a:ext uri="{FF2B5EF4-FFF2-40B4-BE49-F238E27FC236}">
+                <a16:creationId xmlns:a16="http://schemas.microsoft.com/office/drawing/2014/main" id="{B72AAE75-52C1-4A9F-9DC7-EB4EC2AE8390}"/>
+              </a:ext>
+            </a:extLst>
+          </p:cNvPr>
+          <p:cNvPicPr>
+            <a:picLocks noChangeAspect="1"/>
+          </p:cNvPicPr>
+          <p:nvPr/>
+        </p:nvPicPr>
+        <p:blipFill>
+          <a:blip r:embed="rId2"/>
+          <a:stretch>
+            <a:fillRect/>
+          </a:stretch>
+        </p:blipFill>
+        <p:spPr>
+          <a:xfrm>
+            <a:off x="567542" y="1817794"/>
+            <a:ext cx="4918200" cy="3363806"/>
+          </a:xfrm>
+          <a:prstGeom prst="rect">
+            <a:avLst/>
+          </a:prstGeom>
+        </p:spPr>
+      </p:pic>
+    </p:spTree>
+    <p:extLst>
+      <p:ext uri="{BB962C8B-B14F-4D97-AF65-F5344CB8AC3E}">
+        <p14:creationId xmlns:p14="http://schemas.microsoft.com/office/powerpoint/2010/main" val="2346093210"/>
       </p:ext>
     </p:extLst>
   </p:cSld>
@@ -8256,7 +8686,11 @@
               <a:t>これらを踏まえて</a:t>
             </a:r>
             <a:r>
-              <a:rPr kumimoji="1" lang="en-US" altLang="ja-JP" sz="2400" dirty="0"/>
+              <a:rPr kumimoji="1" lang="en-US" altLang="ja-JP" sz="2400" b="1" dirty="0">
+                <a:solidFill>
+                  <a:srgbClr val="FF0000"/>
+                </a:solidFill>
+              </a:rPr>
               <a:t>CollisoinAABB.cpp</a:t>
             </a:r>
             <a:r>
@@ -8269,10 +8703,10 @@
       </p:sp>
       <p:pic>
         <p:nvPicPr>
-          <p:cNvPr id="6" name="図 5">
-            <a:extLst>
-              <a:ext uri="{FF2B5EF4-FFF2-40B4-BE49-F238E27FC236}">
-                <a16:creationId xmlns:a16="http://schemas.microsoft.com/office/drawing/2014/main" id="{01D5BF94-CCE5-4626-9C50-1EE433BB19EF}"/>
+          <p:cNvPr id="3" name="図 2">
+            <a:extLst>
+              <a:ext uri="{FF2B5EF4-FFF2-40B4-BE49-F238E27FC236}">
+                <a16:creationId xmlns:a16="http://schemas.microsoft.com/office/drawing/2014/main" id="{EC967453-EEDE-4DDA-98E1-1DB913463720}"/>
               </a:ext>
             </a:extLst>
           </p:cNvPr>
@@ -8282,21 +8716,15 @@
           <p:nvPr/>
         </p:nvPicPr>
         <p:blipFill>
-          <a:blip r:embed="rId2">
-            <a:extLst>
-              <a:ext uri="{28A0092B-C50C-407E-A947-70E740481C1C}">
-                <a14:useLocalDpi xmlns:a14="http://schemas.microsoft.com/office/drawing/2010/main" val="0"/>
-              </a:ext>
-            </a:extLst>
-          </a:blip>
+          <a:blip r:embed="rId2"/>
           <a:stretch>
             <a:fillRect/>
           </a:stretch>
         </p:blipFill>
         <p:spPr>
           <a:xfrm>
-            <a:off x="567542" y="1817795"/>
-            <a:ext cx="6819759" cy="4367106"/>
+            <a:off x="567542" y="1817794"/>
+            <a:ext cx="8888065" cy="4610743"/>
           </a:xfrm>
           <a:prstGeom prst="rect">
             <a:avLst/>
@@ -8305,10 +8733,10 @@
       </p:pic>
       <p:sp>
         <p:nvSpPr>
-          <p:cNvPr id="10" name="正方形/長方形 9">
-            <a:extLst>
-              <a:ext uri="{FF2B5EF4-FFF2-40B4-BE49-F238E27FC236}">
-                <a16:creationId xmlns:a16="http://schemas.microsoft.com/office/drawing/2014/main" id="{4EB07BF7-85F4-48EA-9C8C-B45844E848E4}"/>
+          <p:cNvPr id="8" name="正方形/長方形 7">
+            <a:extLst>
+              <a:ext uri="{FF2B5EF4-FFF2-40B4-BE49-F238E27FC236}">
+                <a16:creationId xmlns:a16="http://schemas.microsoft.com/office/drawing/2014/main" id="{A222520F-C5BB-4FA8-9269-38C45083DE95}"/>
               </a:ext>
             </a:extLst>
           </p:cNvPr>
@@ -8317,8 +8745,8 @@
         </p:nvSpPr>
         <p:spPr>
           <a:xfrm>
-            <a:off x="1638300" y="4851400"/>
-            <a:ext cx="5168900" cy="914400"/>
+            <a:off x="1927411" y="5514136"/>
+            <a:ext cx="968189" cy="321887"/>
           </a:xfrm>
           <a:prstGeom prst="rect">
             <a:avLst/>
@@ -8436,7 +8864,7 @@
         <p:spPr>
           <a:xfrm>
             <a:off x="567542" y="1216429"/>
-            <a:ext cx="10341293" cy="830997"/>
+            <a:ext cx="10429458" cy="707886"/>
           </a:xfrm>
           <a:prstGeom prst="rect">
             <a:avLst/>
@@ -8450,79 +8878,43 @@
           <a:lstStyle/>
           <a:p>
             <a:r>
-              <a:rPr kumimoji="1" lang="ja-JP" altLang="en-US" sz="2400" dirty="0"/>
+              <a:rPr kumimoji="1" lang="ja-JP" altLang="en-US" sz="2000" dirty="0"/>
               <a:t>今回は当たり判定だけで、</a:t>
             </a:r>
             <a:r>
-              <a:rPr kumimoji="1" lang="en-US" altLang="ja-JP" sz="2400" dirty="0"/>
+              <a:rPr kumimoji="1" lang="en-US" altLang="ja-JP" sz="2000" dirty="0"/>
               <a:t>Collision</a:t>
             </a:r>
             <a:r>
-              <a:rPr kumimoji="1" lang="ja-JP" altLang="en-US" sz="2400" dirty="0"/>
-              <a:t>の管理や設計には詳しく触れません。</a:t>
-            </a:r>
-            <a:endParaRPr kumimoji="1" lang="en-US" altLang="ja-JP" sz="2400" dirty="0"/>
-          </a:p>
-          <a:p>
-            <a:r>
-              <a:rPr lang="ja-JP" altLang="en-US" sz="2400" dirty="0"/>
+              <a:rPr kumimoji="1" lang="ja-JP" altLang="en-US" sz="2000" dirty="0"/>
+              <a:t>の管理や設計、押し出し処理には詳しく触れません。</a:t>
+            </a:r>
+            <a:endParaRPr kumimoji="1" lang="en-US" altLang="ja-JP" sz="2000" dirty="0"/>
+          </a:p>
+          <a:p>
+            <a:r>
+              <a:rPr lang="ja-JP" altLang="en-US" sz="2000" dirty="0"/>
               <a:t>ここで軽く紹介するので、関連するコードはしっかり見ておきましょう。</a:t>
             </a:r>
-            <a:endParaRPr lang="en-US" altLang="ja-JP" sz="2400" dirty="0"/>
-          </a:p>
-        </p:txBody>
-      </p:sp>
-      <p:pic>
-        <p:nvPicPr>
-          <p:cNvPr id="3" name="図 2">
-            <a:extLst>
-              <a:ext uri="{FF2B5EF4-FFF2-40B4-BE49-F238E27FC236}">
-                <a16:creationId xmlns:a16="http://schemas.microsoft.com/office/drawing/2014/main" id="{7A5702D9-9A43-4ABA-888D-70DAA1965433}"/>
-              </a:ext>
-            </a:extLst>
-          </p:cNvPr>
-          <p:cNvPicPr>
-            <a:picLocks noChangeAspect="1"/>
-          </p:cNvPicPr>
+            <a:endParaRPr lang="en-US" altLang="ja-JP" sz="2000" dirty="0"/>
+          </a:p>
+        </p:txBody>
+      </p:sp>
+      <p:sp>
+        <p:nvSpPr>
+          <p:cNvPr id="8" name="テキスト ボックス 7">
+            <a:extLst>
+              <a:ext uri="{FF2B5EF4-FFF2-40B4-BE49-F238E27FC236}">
+                <a16:creationId xmlns:a16="http://schemas.microsoft.com/office/drawing/2014/main" id="{450A1E70-6E92-4DE5-A974-433C9D1297F8}"/>
+              </a:ext>
+            </a:extLst>
+          </p:cNvPr>
+          <p:cNvSpPr txBox="1"/>
           <p:nvPr/>
-        </p:nvPicPr>
-        <p:blipFill>
-          <a:blip r:embed="rId2">
-            <a:extLst>
-              <a:ext uri="{28A0092B-C50C-407E-A947-70E740481C1C}">
-                <a14:useLocalDpi xmlns:a14="http://schemas.microsoft.com/office/drawing/2010/main" val="0"/>
-              </a:ext>
-            </a:extLst>
-          </a:blip>
-          <a:stretch>
-            <a:fillRect/>
-          </a:stretch>
-        </p:blipFill>
+        </p:nvSpPr>
         <p:spPr>
           <a:xfrm>
-            <a:off x="567542" y="2187126"/>
-            <a:ext cx="5238005" cy="4178920"/>
-          </a:xfrm>
-          <a:prstGeom prst="rect">
-            <a:avLst/>
-          </a:prstGeom>
-        </p:spPr>
-      </p:pic>
-      <p:sp>
-        <p:nvSpPr>
-          <p:cNvPr id="8" name="テキスト ボックス 7">
-            <a:extLst>
-              <a:ext uri="{FF2B5EF4-FFF2-40B4-BE49-F238E27FC236}">
-                <a16:creationId xmlns:a16="http://schemas.microsoft.com/office/drawing/2014/main" id="{450A1E70-6E92-4DE5-A974-433C9D1297F8}"/>
-              </a:ext>
-            </a:extLst>
-          </p:cNvPr>
-          <p:cNvSpPr txBox="1"/>
-          <p:nvPr/>
-        </p:nvSpPr>
-        <p:spPr>
-          <a:xfrm>
-            <a:off x="5122595" y="5535049"/>
+            <a:off x="567542" y="5568210"/>
             <a:ext cx="5311069" cy="830997"/>
           </a:xfrm>
           <a:prstGeom prst="rect">
@@ -8563,6 +8955,36 @@
           </a:p>
         </p:txBody>
       </p:sp>
+      <p:pic>
+        <p:nvPicPr>
+          <p:cNvPr id="6" name="図 5">
+            <a:extLst>
+              <a:ext uri="{FF2B5EF4-FFF2-40B4-BE49-F238E27FC236}">
+                <a16:creationId xmlns:a16="http://schemas.microsoft.com/office/drawing/2014/main" id="{9A12016D-707D-46A3-8E69-40F279226CCB}"/>
+              </a:ext>
+            </a:extLst>
+          </p:cNvPr>
+          <p:cNvPicPr>
+            <a:picLocks noChangeAspect="1"/>
+          </p:cNvPicPr>
+          <p:nvPr/>
+        </p:nvPicPr>
+        <p:blipFill>
+          <a:blip r:embed="rId2"/>
+          <a:stretch>
+            <a:fillRect/>
+          </a:stretch>
+        </p:blipFill>
+        <p:spPr>
+          <a:xfrm>
+            <a:off x="567541" y="2064015"/>
+            <a:ext cx="6350549" cy="3413420"/>
+          </a:xfrm>
+          <a:prstGeom prst="rect">
+            <a:avLst/>
+          </a:prstGeom>
+        </p:spPr>
+      </p:pic>
     </p:spTree>
     <p:extLst>
       <p:ext uri="{BB962C8B-B14F-4D97-AF65-F5344CB8AC3E}">
